--- a/output/01-ai-general/01-02-generative-ai.pptx
+++ b/output/01-ai-general/01-02-generative-ai.pptx
@@ -27091,7 +27091,7 @@
                 </a:solidFill>
                 <a:latin typeface="Segoe UI"/>
               </a:rPr>
-              <a:t>Nothing is retrieved. Everything is built.</a:t>
+              <a:t>The wording is built fresh every time, even when a tool has looked something up first.</a:t>
             </a:r>
           </a:p>
         </p:txBody>
@@ -27998,7 +27998,7 @@
                 </a:solidFill>
                 <a:latin typeface="Segoe UI"/>
               </a:rPr>
-              <a:t>Nothing is retrieved. Everything is built.</a:t>
+              <a:t>The wording is built fresh every time, even when a tool has looked something up first.</a:t>
             </a:r>
           </a:p>
         </p:txBody>
@@ -28905,7 +28905,7 @@
                 </a:solidFill>
                 <a:latin typeface="Segoe UI"/>
               </a:rPr>
-              <a:t>Nothing is retrieved. Everything is built.</a:t>
+              <a:t>The wording is built fresh every time, even when a tool has looked something up first.</a:t>
             </a:r>
           </a:p>
         </p:txBody>
@@ -29812,7 +29812,7 @@
                 </a:solidFill>
                 <a:latin typeface="Segoe UI"/>
               </a:rPr>
-              <a:t>Nothing is retrieved. Everything is built.</a:t>
+              <a:t>The wording is built fresh every time, even when a tool has looked something up first.</a:t>
             </a:r>
           </a:p>
         </p:txBody>

--- a/output/01-ai-general/01-02-generative-ai.pptx
+++ b/output/01-ai-general/01-02-generative-ai.pptx
@@ -14182,7 +14182,7 @@
                 </a:solidFill>
                 <a:latin typeface="Segoe UI"/>
               </a:rPr>
-              <a:t>It does not search. It produces text that resembles a finding.</a:t>
+              <a:t>Unless the tool clearly shows it searched, assume it built a plausible-looking answer instead of finding a real one.</a:t>
             </a:r>
           </a:p>
         </p:txBody>
@@ -43942,7 +43942,7 @@
           <a:p>
             <a:pPr algn="l">
               <a:lnSpc>
-                <a:spcPts val="1690"/>
+                <a:spcPts val="1625"/>
               </a:lnSpc>
               <a:spcBef>
                 <a:spcPts val="0"/>
@@ -43952,13 +43952,13 @@
               </a:spcAft>
             </a:pPr>
             <a:r>
-              <a:rPr sz="1300" b="0">
+              <a:rPr sz="1250" b="0">
                 <a:solidFill>
                   <a:srgbClr val="5B6779"/>
                 </a:solidFill>
                 <a:latin typeface="Segoe UI"/>
               </a:rPr>
-              <a:t>It builds, it does not fetch</a:t>
+              <a:t>It builds — even when it looked something up first</a:t>
             </a:r>
           </a:p>
         </p:txBody>
@@ -55605,7 +55605,7 @@
                 </a:solidFill>
                 <a:latin typeface="Segoe UI Semibold"/>
               </a:rPr>
-              <a:t>It builds, it does not fetch</a:t>
+              <a:t>It builds, even when it also looked something up</a:t>
             </a:r>
           </a:p>
         </p:txBody>
@@ -55650,7 +55650,7 @@
                 </a:solidFill>
                 <a:latin typeface="Segoe UI"/>
               </a:rPr>
-              <a:t>Every answer is constructed fresh. There is no page behind it.</a:t>
+              <a:t>The wording is always constructed fresh — assume nothing was looked up unless the tool shows you it was.</a:t>
             </a:r>
           </a:p>
         </p:txBody>
@@ -56825,7 +56825,7 @@
           <a:p>
             <a:pPr algn="l">
               <a:lnSpc>
-                <a:spcPts val="4420"/>
+                <a:spcPts val="3770"/>
               </a:lnSpc>
               <a:spcBef>
                 <a:spcPts val="0"/>
@@ -56835,13 +56835,13 @@
               </a:spcAft>
             </a:pPr>
             <a:r>
-              <a:rPr sz="3400" b="0">
+              <a:rPr sz="2900" b="0">
                 <a:solidFill>
                   <a:srgbClr val="101826"/>
                 </a:solidFill>
                 <a:latin typeface="Segoe UI Semibold"/>
               </a:rPr>
-              <a:t>It builds. It does not fetch.</a:t>
+              <a:t>It builds — even when a tool looked something up first</a:t>
             </a:r>
           </a:p>
         </p:txBody>
@@ -57306,7 +57306,7 @@
         <p:spPr>
           <a:xfrm>
             <a:off x="502920" y="1719072"/>
-            <a:ext cx="8343671" cy="822959"/>
+            <a:ext cx="8343671" cy="1371600"/>
           </a:xfrm>
           <a:prstGeom prst="rect">
             <a:avLst/>
@@ -57337,7 +57337,7 @@
                 </a:solidFill>
                 <a:latin typeface="Segoe UI"/>
               </a:rPr>
-              <a:t>There is no file it is copying from. Every sentence is assembled the moment you ask for it.</a:t>
+              <a:t>By default there is no file it is copying from — the wording is assembled the moment you ask for it. Some tools can search or read a document first and then build the answer from that; assume nothing was looked up unless the tool shows you it was.</a:t>
             </a:r>
           </a:p>
         </p:txBody>
@@ -57350,7 +57350,7 @@
         </p:nvSpPr>
         <p:spPr>
           <a:xfrm>
-            <a:off x="502920" y="3209544"/>
+            <a:off x="502920" y="3675887"/>
             <a:ext cx="2508427" cy="1920240"/>
           </a:xfrm>
           <a:prstGeom prst="roundRect">
@@ -57394,7 +57394,7 @@
         </p:nvSpPr>
         <p:spPr>
           <a:xfrm>
-            <a:off x="685800" y="3026663"/>
+            <a:off x="685800" y="3493007"/>
             <a:ext cx="384048" cy="384048"/>
           </a:xfrm>
           <a:prstGeom prst="ellipse">
@@ -57436,7 +57436,7 @@
         </p:nvSpPr>
         <p:spPr>
           <a:xfrm>
-            <a:off x="685800" y="3104387"/>
+            <a:off x="685800" y="3570731"/>
             <a:ext cx="384048" cy="237744"/>
           </a:xfrm>
           <a:prstGeom prst="rect">
@@ -57481,7 +57481,7 @@
         </p:nvSpPr>
         <p:spPr>
           <a:xfrm>
-            <a:off x="704088" y="3575303"/>
+            <a:off x="704088" y="4041648"/>
             <a:ext cx="2106091" cy="512064"/>
           </a:xfrm>
           <a:prstGeom prst="rect">
@@ -57526,7 +57526,7 @@
         </p:nvSpPr>
         <p:spPr>
           <a:xfrm>
-            <a:off x="704088" y="4123944"/>
+            <a:off x="704088" y="4590288"/>
             <a:ext cx="2106091" cy="841248"/>
           </a:xfrm>
           <a:prstGeom prst="rect">
@@ -57571,7 +57571,7 @@
         </p:nvCxnSpPr>
         <p:spPr>
           <a:xfrm>
-            <a:off x="3093643" y="4169663"/>
+            <a:off x="3093643" y="4636007"/>
             <a:ext cx="219456" cy="0"/>
           </a:xfrm>
           <a:prstGeom prst="line">
@@ -57608,7 +57608,7 @@
         </p:nvSpPr>
         <p:spPr>
           <a:xfrm>
-            <a:off x="3395395" y="3209544"/>
+            <a:off x="3395395" y="3675887"/>
             <a:ext cx="2508427" cy="1920240"/>
           </a:xfrm>
           <a:prstGeom prst="roundRect">
@@ -57652,7 +57652,7 @@
         </p:nvSpPr>
         <p:spPr>
           <a:xfrm>
-            <a:off x="3578275" y="3026663"/>
+            <a:off x="3578275" y="3493007"/>
             <a:ext cx="384048" cy="384048"/>
           </a:xfrm>
           <a:prstGeom prst="ellipse">
@@ -57694,7 +57694,7 @@
         </p:nvSpPr>
         <p:spPr>
           <a:xfrm>
-            <a:off x="3578275" y="3104387"/>
+            <a:off x="3578275" y="3570731"/>
             <a:ext cx="384048" cy="237744"/>
           </a:xfrm>
           <a:prstGeom prst="rect">
@@ -57739,7 +57739,7 @@
         </p:nvSpPr>
         <p:spPr>
           <a:xfrm>
-            <a:off x="3596563" y="3575303"/>
+            <a:off x="3596563" y="4041648"/>
             <a:ext cx="2106091" cy="512064"/>
           </a:xfrm>
           <a:prstGeom prst="rect">
@@ -57784,7 +57784,7 @@
         </p:nvSpPr>
         <p:spPr>
           <a:xfrm>
-            <a:off x="3596563" y="4123944"/>
+            <a:off x="3596563" y="4590288"/>
             <a:ext cx="2106091" cy="841248"/>
           </a:xfrm>
           <a:prstGeom prst="rect">
@@ -57829,7 +57829,7 @@
         </p:nvCxnSpPr>
         <p:spPr>
           <a:xfrm>
-            <a:off x="5986119" y="4169663"/>
+            <a:off x="5986119" y="4636007"/>
             <a:ext cx="219456" cy="0"/>
           </a:xfrm>
           <a:prstGeom prst="line">
@@ -57866,7 +57866,7 @@
         </p:nvSpPr>
         <p:spPr>
           <a:xfrm>
-            <a:off x="6287871" y="3209544"/>
+            <a:off x="6287871" y="3675887"/>
             <a:ext cx="2508427" cy="1920240"/>
           </a:xfrm>
           <a:prstGeom prst="roundRect">
@@ -57910,7 +57910,7 @@
         </p:nvSpPr>
         <p:spPr>
           <a:xfrm>
-            <a:off x="6470751" y="3026663"/>
+            <a:off x="6470751" y="3493007"/>
             <a:ext cx="384048" cy="384048"/>
           </a:xfrm>
           <a:prstGeom prst="ellipse">
@@ -57952,7 +57952,7 @@
         </p:nvSpPr>
         <p:spPr>
           <a:xfrm>
-            <a:off x="6470751" y="3104387"/>
+            <a:off x="6470751" y="3570731"/>
             <a:ext cx="384048" cy="237744"/>
           </a:xfrm>
           <a:prstGeom prst="rect">
@@ -57997,7 +57997,7 @@
         </p:nvSpPr>
         <p:spPr>
           <a:xfrm>
-            <a:off x="6489039" y="3575303"/>
+            <a:off x="6489039" y="4041648"/>
             <a:ext cx="2106091" cy="512064"/>
           </a:xfrm>
           <a:prstGeom prst="rect">
@@ -58042,7 +58042,7 @@
         </p:nvSpPr>
         <p:spPr>
           <a:xfrm>
-            <a:off x="6489039" y="4123944"/>
+            <a:off x="6489039" y="4590288"/>
             <a:ext cx="2106091" cy="841248"/>
           </a:xfrm>
           <a:prstGeom prst="rect">
@@ -58087,7 +58087,7 @@
         </p:nvCxnSpPr>
         <p:spPr>
           <a:xfrm>
-            <a:off x="8878595" y="4169663"/>
+            <a:off x="8878595" y="4636007"/>
             <a:ext cx="219456" cy="0"/>
           </a:xfrm>
           <a:prstGeom prst="line">
@@ -58124,7 +58124,7 @@
         </p:nvSpPr>
         <p:spPr>
           <a:xfrm>
-            <a:off x="9180347" y="3209544"/>
+            <a:off x="9180347" y="3675887"/>
             <a:ext cx="2508427" cy="1920240"/>
           </a:xfrm>
           <a:prstGeom prst="roundRect">
@@ -58168,7 +58168,7 @@
         </p:nvSpPr>
         <p:spPr>
           <a:xfrm>
-            <a:off x="9363227" y="3026663"/>
+            <a:off x="9363227" y="3493007"/>
             <a:ext cx="384048" cy="384048"/>
           </a:xfrm>
           <a:prstGeom prst="ellipse">
@@ -58210,7 +58210,7 @@
         </p:nvSpPr>
         <p:spPr>
           <a:xfrm>
-            <a:off x="9363227" y="3104387"/>
+            <a:off x="9363227" y="3570731"/>
             <a:ext cx="384048" cy="237744"/>
           </a:xfrm>
           <a:prstGeom prst="rect">
@@ -58255,7 +58255,7 @@
         </p:nvSpPr>
         <p:spPr>
           <a:xfrm>
-            <a:off x="9381515" y="3575303"/>
+            <a:off x="9381515" y="4041648"/>
             <a:ext cx="2106091" cy="512064"/>
           </a:xfrm>
           <a:prstGeom prst="rect">
@@ -58300,7 +58300,7 @@
         </p:nvSpPr>
         <p:spPr>
           <a:xfrm>
-            <a:off x="9381515" y="4123944"/>
+            <a:off x="9381515" y="4590288"/>
             <a:ext cx="2106091" cy="841248"/>
           </a:xfrm>
           <a:prstGeom prst="rect">
@@ -63384,7 +63384,7 @@
                 </a:solidFill>
                 <a:latin typeface="Segoe UI"/>
               </a:rPr>
-              <a:t>This is why two colleagues asking the same question get different wording. Neither answer was retrieved. Both were made.</a:t>
+              <a:t>This is why two colleagues asking the same question often get different wording: the wording itself is always built fresh, even on the occasions when a tool looked something up first.</a:t>
             </a:r>
           </a:p>
         </p:txBody>
